--- a/dist/초2/국어/기초문해/초2_국어_기초문해_04_낱말의관계_학생용.pptx
+++ b/dist/초2/국어/기초문해/초2_국어_기초문해_04_낱말의관계_학생용.pptx
@@ -118,38 +118,38 @@
   <p:extLst>
     <p:ext uri="{521415D9-36F7-43E2-AB2F-B90AF26B5E84}">
       <p14:sectionLst xmlns:p14="http://schemas.microsoft.com/office/powerpoint/2010/main">
-        <p14:section name="도입" id="{3b004b68-1f4c-fb6c-59ca-373b3c79d805}">
+        <p14:section name="도입" id="{cb533bab-1a40-b756-d6ad-e2f34e4d89b0}">
           <p14:sldIdLst>
             <p14:sldId id="256"/>
             <p14:sldId id="257"/>
           </p14:sldIdLst>
         </p14:section>
-        <p14:section name="개념" id="{6a54e71a-9adb-a2f1-eb96-2b2a805d5816}">
+        <p14:section name="개념" id="{42572558-9b9d-a3de-5abb-c9ced7cae77a}">
           <p14:sldIdLst>
             <p14:sldId id="258"/>
             <p14:sldId id="259"/>
             <p14:sldId id="260"/>
           </p14:sldIdLst>
         </p14:section>
-        <p14:section name="연습" id="{9ac4bffd-c97d-74d7-4c60-dfff6be0a708}">
+        <p14:section name="연습" id="{7f4336ba-840b-3b8a-7a19-3486ca58dd9c}">
           <p14:sldIdLst>
             <p14:sldId id="261"/>
             <p14:sldId id="262"/>
             <p14:sldId id="263"/>
           </p14:sldIdLst>
         </p14:section>
-        <p14:section name="확인" id="{47e247bb-2cfc-2ac4-0c82-0be7ae9232fc}">
+        <p14:section name="확인" id="{f86ebc52-6f44-37dd-a0b0-45ffe37825d9}">
           <p14:sldIdLst>
             <p14:sldId id="264"/>
             <p14:sldId id="265"/>
           </p14:sldIdLst>
         </p14:section>
-        <p14:section name="정리" id="{076616f4-c37d-e530-5b96-f2013f1102a0}">
+        <p14:section name="정리" id="{f72b1f68-1cf3-6f48-7a69-123fddd8266b}">
           <p14:sldIdLst>
             <p14:sldId id="266"/>
           </p14:sldIdLst>
         </p14:section>
-        <p14:section name="보충" id="{edd6beb3-07c6-b219-2759-1b890b109028}">
+        <p14:section name="보충" id="{4482ada9-4769-1a22-69d9-dfb7a9e2326a}">
           <p14:sldIdLst>
             <p14:sldId id="267"/>
           </p14:sldIdLst>

--- a/dist/초2/국어/기초문해/초2_국어_기초문해_04_낱말의관계_학생용.pptx
+++ b/dist/초2/국어/기초문해/초2_국어_기초문해_04_낱말의관계_학생용.pptx
@@ -118,38 +118,38 @@
   <p:extLst>
     <p:ext uri="{521415D9-36F7-43E2-AB2F-B90AF26B5E84}">
       <p14:sectionLst xmlns:p14="http://schemas.microsoft.com/office/powerpoint/2010/main">
-        <p14:section name="도입" id="{cb533bab-1a40-b756-d6ad-e2f34e4d89b0}">
+        <p14:section name="도입" id="{94bd1480-eca1-052a-2982-b5002e55c1c0}">
           <p14:sldIdLst>
             <p14:sldId id="256"/>
             <p14:sldId id="257"/>
           </p14:sldIdLst>
         </p14:section>
-        <p14:section name="개념" id="{42572558-9b9d-a3de-5abb-c9ced7cae77a}">
+        <p14:section name="개념" id="{6be5315e-f670-7298-2997-a1a160472835}">
           <p14:sldIdLst>
             <p14:sldId id="258"/>
             <p14:sldId id="259"/>
             <p14:sldId id="260"/>
           </p14:sldIdLst>
         </p14:section>
-        <p14:section name="연습" id="{7f4336ba-840b-3b8a-7a19-3486ca58dd9c}">
+        <p14:section name="연습" id="{dcb1da39-add3-9045-7bfd-bedf61e3d71f}">
           <p14:sldIdLst>
             <p14:sldId id="261"/>
             <p14:sldId id="262"/>
             <p14:sldId id="263"/>
           </p14:sldIdLst>
         </p14:section>
-        <p14:section name="확인" id="{f86ebc52-6f44-37dd-a0b0-45ffe37825d9}">
+        <p14:section name="확인" id="{4c228d25-155e-fa9f-ab4c-454c7b2ce22e}">
           <p14:sldIdLst>
             <p14:sldId id="264"/>
             <p14:sldId id="265"/>
           </p14:sldIdLst>
         </p14:section>
-        <p14:section name="정리" id="{f72b1f68-1cf3-6f48-7a69-123fddd8266b}">
+        <p14:section name="정리" id="{ea1b6d0b-0128-4d75-ff7a-e6976ff74276}">
           <p14:sldIdLst>
             <p14:sldId id="266"/>
           </p14:sldIdLst>
         </p14:section>
-        <p14:section name="보충" id="{4482ada9-4769-1a22-69d9-dfb7a9e2326a}">
+        <p14:section name="보충" id="{288bdef1-d354-f2a2-6d9c-d8c6fd82e60a}">
           <p14:sldIdLst>
             <p14:sldId id="267"/>
           </p14:sldIdLst>
